--- a/make_presentation/templates/templates/creative/no_logo_12.pptx
+++ b/make_presentation/templates/templates/creative/no_logo_12.pptx
@@ -303,7 +303,7 @@
             <a:pPr algn="r">
               <a:buNone/>
             </a:pPr>
-            <a:fld id="{7721AC49-A07B-4EAE-AF98-ADDCD10EC574}" type="slidenum">
+            <a:fld id="{22F44959-A477-486E-8517-7CF86E6D78FE}" type="slidenum">
               <a:rPr b="0" lang="en-US" sz="1400" spc="-1" strike="noStrike">
                 <a:latin typeface="Times New Roman"/>
               </a:rPr>
@@ -351,7 +351,7 @@
         <p:spPr>
           <a:xfrm>
             <a:off x="685800" y="1143000"/>
-            <a:ext cx="5485680" cy="3085560"/>
+            <a:ext cx="5485320" cy="3085200"/>
           </a:xfrm>
           <a:prstGeom prst="rect">
             <a:avLst/>
@@ -374,7 +374,7 @@
         <p:spPr>
           <a:xfrm>
             <a:off x="685800" y="4400640"/>
-            <a:ext cx="5485680" cy="3599640"/>
+            <a:ext cx="5485320" cy="3599280"/>
           </a:xfrm>
           <a:prstGeom prst="rect">
             <a:avLst/>
@@ -408,7 +408,7 @@
         <p:spPr>
           <a:xfrm>
             <a:off x="3884760" y="8685360"/>
-            <a:ext cx="2971080" cy="457920"/>
+            <a:ext cx="2970720" cy="457560"/>
           </a:xfrm>
           <a:prstGeom prst="rect">
             <a:avLst/>
@@ -440,7 +440,7 @@
               </a:lnSpc>
               <a:buNone/>
             </a:pPr>
-            <a:fld id="{E931389C-7F33-4FFC-A143-3282A08C6F3F}" type="slidenum">
+            <a:fld id="{2D4B112D-DDBC-423A-8031-8C0625C6A403}" type="slidenum">
               <a:rPr b="0" lang="ru-RU" sz="1200" spc="-1" strike="noStrike">
                 <a:latin typeface="Times New Roman"/>
               </a:rPr>
@@ -487,7 +487,7 @@
         <p:spPr>
           <a:xfrm>
             <a:off x="685800" y="1143000"/>
-            <a:ext cx="5485680" cy="3085560"/>
+            <a:ext cx="5485320" cy="3085200"/>
           </a:xfrm>
           <a:prstGeom prst="rect">
             <a:avLst/>
@@ -510,7 +510,7 @@
         <p:spPr>
           <a:xfrm>
             <a:off x="685800" y="4400640"/>
-            <a:ext cx="5485680" cy="3599640"/>
+            <a:ext cx="5485320" cy="3599280"/>
           </a:xfrm>
           <a:prstGeom prst="rect">
             <a:avLst/>
@@ -544,7 +544,7 @@
         <p:spPr>
           <a:xfrm>
             <a:off x="3884760" y="8685360"/>
-            <a:ext cx="2971080" cy="457920"/>
+            <a:ext cx="2970720" cy="457560"/>
           </a:xfrm>
           <a:prstGeom prst="rect">
             <a:avLst/>
@@ -576,7 +576,7 @@
               </a:lnSpc>
               <a:buNone/>
             </a:pPr>
-            <a:fld id="{9DFC4DA1-F413-48D1-9EA6-502C188BFDB4}" type="slidenum">
+            <a:fld id="{0EF007E2-C69F-41A2-967B-C77C7799D3E7}" type="slidenum">
               <a:rPr b="0" lang="ru-RU" sz="1200" spc="-1" strike="noStrike">
                 <a:latin typeface="Times New Roman"/>
               </a:rPr>
@@ -623,7 +623,7 @@
         <p:spPr>
           <a:xfrm>
             <a:off x="685800" y="1143000"/>
-            <a:ext cx="5485680" cy="3085560"/>
+            <a:ext cx="5485320" cy="3085200"/>
           </a:xfrm>
           <a:prstGeom prst="rect">
             <a:avLst/>
@@ -646,7 +646,7 @@
         <p:spPr>
           <a:xfrm>
             <a:off x="685800" y="4400640"/>
-            <a:ext cx="5485680" cy="3599640"/>
+            <a:ext cx="5485320" cy="3599280"/>
           </a:xfrm>
           <a:prstGeom prst="rect">
             <a:avLst/>
@@ -680,7 +680,7 @@
         <p:spPr>
           <a:xfrm>
             <a:off x="3884760" y="8685360"/>
-            <a:ext cx="2971080" cy="457920"/>
+            <a:ext cx="2970720" cy="457560"/>
           </a:xfrm>
           <a:prstGeom prst="rect">
             <a:avLst/>
@@ -712,7 +712,7 @@
               </a:lnSpc>
               <a:buNone/>
             </a:pPr>
-            <a:fld id="{06A3398B-447B-4C58-88FB-1041F7853957}" type="slidenum">
+            <a:fld id="{BA420E14-8167-43D9-824C-45319E82773A}" type="slidenum">
               <a:rPr b="0" lang="ru-RU" sz="1200" spc="-1" strike="noStrike">
                 <a:latin typeface="Times New Roman"/>
               </a:rPr>
@@ -759,7 +759,7 @@
         <p:spPr>
           <a:xfrm>
             <a:off x="685800" y="1143000"/>
-            <a:ext cx="5485680" cy="3085560"/>
+            <a:ext cx="5485320" cy="3085200"/>
           </a:xfrm>
           <a:prstGeom prst="rect">
             <a:avLst/>
@@ -782,7 +782,7 @@
         <p:spPr>
           <a:xfrm>
             <a:off x="685800" y="4400640"/>
-            <a:ext cx="5485680" cy="3599640"/>
+            <a:ext cx="5485320" cy="3599280"/>
           </a:xfrm>
           <a:prstGeom prst="rect">
             <a:avLst/>
@@ -816,7 +816,7 @@
         <p:spPr>
           <a:xfrm>
             <a:off x="3884760" y="8685360"/>
-            <a:ext cx="2971080" cy="457920"/>
+            <a:ext cx="2970720" cy="457560"/>
           </a:xfrm>
           <a:prstGeom prst="rect">
             <a:avLst/>
@@ -848,7 +848,7 @@
               </a:lnSpc>
               <a:buNone/>
             </a:pPr>
-            <a:fld id="{2A25E3BF-4DDB-453A-A710-C367E84ED410}" type="slidenum">
+            <a:fld id="{985B6782-9534-49C0-A219-33D0B3B9E5FF}" type="slidenum">
               <a:rPr b="0" lang="ru-RU" sz="1200" spc="-1" strike="noStrike">
                 <a:latin typeface="Times New Roman"/>
               </a:rPr>
@@ -916,7 +916,7 @@
         <p:txBody>
           <a:bodyPr/>
           <a:p>
-            <a:fld id="{AFA2C671-D9DE-45C2-8FF8-3E467FE11DC3}" type="slidenum">
+            <a:fld id="{51A488EF-5351-4018-83B0-C7387BA06DE5}" type="slidenum">
               <a:t>&lt;#&gt;</a:t>
             </a:fld>
           </a:p>
@@ -978,7 +978,7 @@
         <p:spPr>
           <a:xfrm>
             <a:off x="1143000" y="841680"/>
-            <a:ext cx="6857280" cy="1789920"/>
+            <a:ext cx="6856920" cy="1789560"/>
           </a:xfrm>
           <a:prstGeom prst="rect">
             <a:avLst/>
@@ -1015,7 +1015,7 @@
         <p:spPr>
           <a:xfrm>
             <a:off x="457200" y="1203480"/>
-            <a:ext cx="8229240" cy="1422720"/>
+            <a:ext cx="8228880" cy="1422360"/>
           </a:xfrm>
           <a:prstGeom prst="rect">
             <a:avLst/>
@@ -1048,8 +1048,8 @@
         </p:nvSpPr>
         <p:spPr>
           <a:xfrm>
-            <a:off x="457200" y="2761920"/>
-            <a:ext cx="8229240" cy="1422720"/>
+            <a:off x="457200" y="2761200"/>
+            <a:ext cx="8228880" cy="1422360"/>
           </a:xfrm>
           <a:prstGeom prst="rect">
             <a:avLst/>
@@ -1104,7 +1104,7 @@
         <p:txBody>
           <a:bodyPr/>
           <a:p>
-            <a:fld id="{FDF1A865-71ED-48C3-A889-ED344F602025}" type="slidenum">
+            <a:fld id="{91D2DB1F-8956-48E1-AF9B-500B7FEEFD13}" type="slidenum">
               <a:t>&lt;#&gt;</a:t>
             </a:fld>
           </a:p>
@@ -1166,7 +1166,7 @@
         <p:spPr>
           <a:xfrm>
             <a:off x="1143000" y="841680"/>
-            <a:ext cx="6857280" cy="1789920"/>
+            <a:ext cx="6856920" cy="1789560"/>
           </a:xfrm>
           <a:prstGeom prst="rect">
             <a:avLst/>
@@ -1203,7 +1203,7 @@
         <p:spPr>
           <a:xfrm>
             <a:off x="457200" y="1203480"/>
-            <a:ext cx="4015800" cy="1422720"/>
+            <a:ext cx="4015440" cy="1422360"/>
           </a:xfrm>
           <a:prstGeom prst="rect">
             <a:avLst/>
@@ -1236,8 +1236,8 @@
         </p:nvSpPr>
         <p:spPr>
           <a:xfrm>
-            <a:off x="4674240" y="1203480"/>
-            <a:ext cx="4015800" cy="1422720"/>
+            <a:off x="4673880" y="1203480"/>
+            <a:ext cx="4015440" cy="1422360"/>
           </a:xfrm>
           <a:prstGeom prst="rect">
             <a:avLst/>
@@ -1270,8 +1270,8 @@
         </p:nvSpPr>
         <p:spPr>
           <a:xfrm>
-            <a:off x="457200" y="2761920"/>
-            <a:ext cx="4015800" cy="1422720"/>
+            <a:off x="457200" y="2761200"/>
+            <a:ext cx="4015440" cy="1422360"/>
           </a:xfrm>
           <a:prstGeom prst="rect">
             <a:avLst/>
@@ -1304,8 +1304,8 @@
         </p:nvSpPr>
         <p:spPr>
           <a:xfrm>
-            <a:off x="4674240" y="2761920"/>
-            <a:ext cx="4015800" cy="1422720"/>
+            <a:off x="4673880" y="2761200"/>
+            <a:ext cx="4015440" cy="1422360"/>
           </a:xfrm>
           <a:prstGeom prst="rect">
             <a:avLst/>
@@ -1360,7 +1360,7 @@
         <p:txBody>
           <a:bodyPr/>
           <a:p>
-            <a:fld id="{83707E49-A790-457E-8EC6-A33E91DC0379}" type="slidenum">
+            <a:fld id="{49D519BA-B5A3-4388-9361-F46FA3D5228D}" type="slidenum">
               <a:t>&lt;#&gt;</a:t>
             </a:fld>
           </a:p>
@@ -1422,7 +1422,7 @@
         <p:spPr>
           <a:xfrm>
             <a:off x="1143000" y="841680"/>
-            <a:ext cx="6857280" cy="1789920"/>
+            <a:ext cx="6856920" cy="1789560"/>
           </a:xfrm>
           <a:prstGeom prst="rect">
             <a:avLst/>
@@ -1459,7 +1459,7 @@
         <p:spPr>
           <a:xfrm>
             <a:off x="457200" y="1203480"/>
-            <a:ext cx="2649600" cy="1422720"/>
+            <a:ext cx="2649600" cy="1422360"/>
           </a:xfrm>
           <a:prstGeom prst="rect">
             <a:avLst/>
@@ -1493,7 +1493,7 @@
         <p:spPr>
           <a:xfrm>
             <a:off x="3239640" y="1203480"/>
-            <a:ext cx="2649600" cy="1422720"/>
+            <a:ext cx="2649600" cy="1422360"/>
           </a:xfrm>
           <a:prstGeom prst="rect">
             <a:avLst/>
@@ -1527,7 +1527,7 @@
         <p:spPr>
           <a:xfrm>
             <a:off x="6022080" y="1203480"/>
-            <a:ext cx="2649600" cy="1422720"/>
+            <a:ext cx="2649600" cy="1422360"/>
           </a:xfrm>
           <a:prstGeom prst="rect">
             <a:avLst/>
@@ -1560,8 +1560,8 @@
         </p:nvSpPr>
         <p:spPr>
           <a:xfrm>
-            <a:off x="457200" y="2761920"/>
-            <a:ext cx="2649600" cy="1422720"/>
+            <a:off x="457200" y="2761200"/>
+            <a:ext cx="2649600" cy="1422360"/>
           </a:xfrm>
           <a:prstGeom prst="rect">
             <a:avLst/>
@@ -1594,8 +1594,8 @@
         </p:nvSpPr>
         <p:spPr>
           <a:xfrm>
-            <a:off x="3239640" y="2761920"/>
-            <a:ext cx="2649600" cy="1422720"/>
+            <a:off x="3239640" y="2761200"/>
+            <a:ext cx="2649600" cy="1422360"/>
           </a:xfrm>
           <a:prstGeom prst="rect">
             <a:avLst/>
@@ -1628,8 +1628,8 @@
         </p:nvSpPr>
         <p:spPr>
           <a:xfrm>
-            <a:off x="6022080" y="2761920"/>
-            <a:ext cx="2649600" cy="1422720"/>
+            <a:off x="6022080" y="2761200"/>
+            <a:ext cx="2649600" cy="1422360"/>
           </a:xfrm>
           <a:prstGeom prst="rect">
             <a:avLst/>
@@ -1684,7 +1684,7 @@
         <p:txBody>
           <a:bodyPr/>
           <a:p>
-            <a:fld id="{AF5EC669-B957-43DB-B038-757D20C60FD9}" type="slidenum">
+            <a:fld id="{EA0A9C26-734B-44B5-AFDC-60F8D159999E}" type="slidenum">
               <a:t>&lt;#&gt;</a:t>
             </a:fld>
           </a:p>
@@ -1746,7 +1746,7 @@
         <p:spPr>
           <a:xfrm>
             <a:off x="1143000" y="841680"/>
-            <a:ext cx="6857280" cy="1789920"/>
+            <a:ext cx="6856920" cy="1789560"/>
           </a:xfrm>
           <a:prstGeom prst="rect">
             <a:avLst/>
@@ -1783,7 +1783,7 @@
         <p:spPr>
           <a:xfrm>
             <a:off x="457200" y="1203480"/>
-            <a:ext cx="8229240" cy="2982960"/>
+            <a:ext cx="8228880" cy="2982600"/>
           </a:xfrm>
           <a:prstGeom prst="rect">
             <a:avLst/>
@@ -1841,7 +1841,7 @@
         <p:txBody>
           <a:bodyPr/>
           <a:p>
-            <a:fld id="{31E33ED0-800A-45FC-BE11-B7C6DD57C4A1}" type="slidenum">
+            <a:fld id="{7EBC36CF-FF5B-4387-87BC-0991B8AC820F}" type="slidenum">
               <a:t>&lt;#&gt;</a:t>
             </a:fld>
           </a:p>
@@ -1903,7 +1903,7 @@
         <p:spPr>
           <a:xfrm>
             <a:off x="1143000" y="841680"/>
-            <a:ext cx="6857280" cy="1789920"/>
+            <a:ext cx="6856920" cy="1789560"/>
           </a:xfrm>
           <a:prstGeom prst="rect">
             <a:avLst/>
@@ -1940,7 +1940,7 @@
         <p:spPr>
           <a:xfrm>
             <a:off x="457200" y="1203480"/>
-            <a:ext cx="8229240" cy="2982960"/>
+            <a:ext cx="8228880" cy="2982600"/>
           </a:xfrm>
           <a:prstGeom prst="rect">
             <a:avLst/>
@@ -1995,7 +1995,7 @@
         <p:txBody>
           <a:bodyPr/>
           <a:p>
-            <a:fld id="{9473F281-9CA5-470A-9350-C4403B2C492C}" type="slidenum">
+            <a:fld id="{9CDACE95-3020-4058-9E1D-0EC13C892B8C}" type="slidenum">
               <a:t>&lt;#&gt;</a:t>
             </a:fld>
           </a:p>
@@ -2057,7 +2057,7 @@
         <p:spPr>
           <a:xfrm>
             <a:off x="1143000" y="841680"/>
-            <a:ext cx="6857280" cy="1789920"/>
+            <a:ext cx="6856920" cy="1789560"/>
           </a:xfrm>
           <a:prstGeom prst="rect">
             <a:avLst/>
@@ -2094,7 +2094,7 @@
         <p:spPr>
           <a:xfrm>
             <a:off x="457200" y="1203480"/>
-            <a:ext cx="4015800" cy="2982960"/>
+            <a:ext cx="4015440" cy="2982600"/>
           </a:xfrm>
           <a:prstGeom prst="rect">
             <a:avLst/>
@@ -2127,8 +2127,8 @@
         </p:nvSpPr>
         <p:spPr>
           <a:xfrm>
-            <a:off x="4674240" y="1203480"/>
-            <a:ext cx="4015800" cy="2982960"/>
+            <a:off x="4673880" y="1203480"/>
+            <a:ext cx="4015440" cy="2982600"/>
           </a:xfrm>
           <a:prstGeom prst="rect">
             <a:avLst/>
@@ -2183,7 +2183,7 @@
         <p:txBody>
           <a:bodyPr/>
           <a:p>
-            <a:fld id="{AACD2E85-49D7-4C38-8EEB-FB5A27EDC50F}" type="slidenum">
+            <a:fld id="{222FFEC9-4498-4D1A-AECF-520F216F229C}" type="slidenum">
               <a:t>&lt;#&gt;</a:t>
             </a:fld>
           </a:p>
@@ -2245,7 +2245,7 @@
         <p:spPr>
           <a:xfrm>
             <a:off x="1143000" y="841680"/>
-            <a:ext cx="6857280" cy="1789920"/>
+            <a:ext cx="6856920" cy="1789560"/>
           </a:xfrm>
           <a:prstGeom prst="rect">
             <a:avLst/>
@@ -2303,7 +2303,7 @@
         <p:txBody>
           <a:bodyPr/>
           <a:p>
-            <a:fld id="{CEBCCE8F-9843-4FA2-8993-13C791CF3F01}" type="slidenum">
+            <a:fld id="{79935F53-A756-41D0-8F2B-1C65DD8DE42D}" type="slidenum">
               <a:t>&lt;#&gt;</a:t>
             </a:fld>
           </a:p>
@@ -2365,7 +2365,7 @@
         <p:spPr>
           <a:xfrm>
             <a:off x="1143000" y="841680"/>
-            <a:ext cx="6857280" cy="8298360"/>
+            <a:ext cx="6856920" cy="8296560"/>
           </a:xfrm>
           <a:prstGeom prst="rect">
             <a:avLst/>
@@ -2423,7 +2423,7 @@
         <p:txBody>
           <a:bodyPr/>
           <a:p>
-            <a:fld id="{1AC7271C-6F1A-4333-B8F7-8FC1BBC6AA21}" type="slidenum">
+            <a:fld id="{12C98E04-847F-4EF3-9A2B-7F4E45F351AB}" type="slidenum">
               <a:t>&lt;#&gt;</a:t>
             </a:fld>
           </a:p>
@@ -2485,7 +2485,7 @@
         <p:spPr>
           <a:xfrm>
             <a:off x="1143000" y="841680"/>
-            <a:ext cx="6857280" cy="1789920"/>
+            <a:ext cx="6856920" cy="1789560"/>
           </a:xfrm>
           <a:prstGeom prst="rect">
             <a:avLst/>
@@ -2522,7 +2522,7 @@
         <p:spPr>
           <a:xfrm>
             <a:off x="457200" y="1203480"/>
-            <a:ext cx="4015800" cy="1422720"/>
+            <a:ext cx="4015440" cy="1422360"/>
           </a:xfrm>
           <a:prstGeom prst="rect">
             <a:avLst/>
@@ -2555,8 +2555,8 @@
         </p:nvSpPr>
         <p:spPr>
           <a:xfrm>
-            <a:off x="4674240" y="1203480"/>
-            <a:ext cx="4015800" cy="2982960"/>
+            <a:off x="4673880" y="1203480"/>
+            <a:ext cx="4015440" cy="2982600"/>
           </a:xfrm>
           <a:prstGeom prst="rect">
             <a:avLst/>
@@ -2589,8 +2589,8 @@
         </p:nvSpPr>
         <p:spPr>
           <a:xfrm>
-            <a:off x="457200" y="2761920"/>
-            <a:ext cx="4015800" cy="1422720"/>
+            <a:off x="457200" y="2761200"/>
+            <a:ext cx="4015440" cy="1422360"/>
           </a:xfrm>
           <a:prstGeom prst="rect">
             <a:avLst/>
@@ -2645,7 +2645,7 @@
         <p:txBody>
           <a:bodyPr/>
           <a:p>
-            <a:fld id="{AF8BE426-50B4-4501-8578-B3B78A703F86}" type="slidenum">
+            <a:fld id="{EC37418B-F323-41C5-94E4-FF23C5EB9E26}" type="slidenum">
               <a:t>&lt;#&gt;</a:t>
             </a:fld>
           </a:p>
@@ -2707,7 +2707,7 @@
         <p:spPr>
           <a:xfrm>
             <a:off x="1143000" y="841680"/>
-            <a:ext cx="6857280" cy="1789920"/>
+            <a:ext cx="6856920" cy="1789560"/>
           </a:xfrm>
           <a:prstGeom prst="rect">
             <a:avLst/>
@@ -2744,7 +2744,7 @@
         <p:spPr>
           <a:xfrm>
             <a:off x="457200" y="1203480"/>
-            <a:ext cx="4015800" cy="2982960"/>
+            <a:ext cx="4015440" cy="2982600"/>
           </a:xfrm>
           <a:prstGeom prst="rect">
             <a:avLst/>
@@ -2777,8 +2777,8 @@
         </p:nvSpPr>
         <p:spPr>
           <a:xfrm>
-            <a:off x="4674240" y="1203480"/>
-            <a:ext cx="4015800" cy="1422720"/>
+            <a:off x="4673880" y="1203480"/>
+            <a:ext cx="4015440" cy="1422360"/>
           </a:xfrm>
           <a:prstGeom prst="rect">
             <a:avLst/>
@@ -2811,8 +2811,8 @@
         </p:nvSpPr>
         <p:spPr>
           <a:xfrm>
-            <a:off x="4674240" y="2761920"/>
-            <a:ext cx="4015800" cy="1422720"/>
+            <a:off x="4673880" y="2761200"/>
+            <a:ext cx="4015440" cy="1422360"/>
           </a:xfrm>
           <a:prstGeom prst="rect">
             <a:avLst/>
@@ -2867,7 +2867,7 @@
         <p:txBody>
           <a:bodyPr/>
           <a:p>
-            <a:fld id="{11F48C7F-60CB-4B26-BA7E-507E2D6200D6}" type="slidenum">
+            <a:fld id="{5A8E35C3-16F9-4BA3-93E3-ECFC6B23D45F}" type="slidenum">
               <a:t>&lt;#&gt;</a:t>
             </a:fld>
           </a:p>
@@ -2929,7 +2929,7 @@
         <p:spPr>
           <a:xfrm>
             <a:off x="1143000" y="841680"/>
-            <a:ext cx="6857280" cy="1789920"/>
+            <a:ext cx="6856920" cy="1789560"/>
           </a:xfrm>
           <a:prstGeom prst="rect">
             <a:avLst/>
@@ -2966,7 +2966,7 @@
         <p:spPr>
           <a:xfrm>
             <a:off x="457200" y="1203480"/>
-            <a:ext cx="4015800" cy="1422720"/>
+            <a:ext cx="4015440" cy="1422360"/>
           </a:xfrm>
           <a:prstGeom prst="rect">
             <a:avLst/>
@@ -2999,8 +2999,8 @@
         </p:nvSpPr>
         <p:spPr>
           <a:xfrm>
-            <a:off x="4674240" y="1203480"/>
-            <a:ext cx="4015800" cy="1422720"/>
+            <a:off x="4673880" y="1203480"/>
+            <a:ext cx="4015440" cy="1422360"/>
           </a:xfrm>
           <a:prstGeom prst="rect">
             <a:avLst/>
@@ -3033,8 +3033,8 @@
         </p:nvSpPr>
         <p:spPr>
           <a:xfrm>
-            <a:off x="457200" y="2761920"/>
-            <a:ext cx="8229240" cy="1422720"/>
+            <a:off x="457200" y="2761200"/>
+            <a:ext cx="8228880" cy="1422360"/>
           </a:xfrm>
           <a:prstGeom prst="rect">
             <a:avLst/>
@@ -3089,7 +3089,7 @@
         <p:txBody>
           <a:bodyPr/>
           <a:p>
-            <a:fld id="{94186D5E-9C73-4C88-9FD0-3C4A826C2223}" type="slidenum">
+            <a:fld id="{F245669C-3C44-48D7-8E0D-3EF3D57A55CB}" type="slidenum">
               <a:t>&lt;#&gt;</a:t>
             </a:fld>
           </a:p>
@@ -3158,7 +3158,7 @@
         <p:spPr>
           <a:xfrm>
             <a:off x="1143000" y="841680"/>
-            <a:ext cx="6857280" cy="1789920"/>
+            <a:ext cx="6856920" cy="1789560"/>
           </a:xfrm>
           <a:prstGeom prst="rect">
             <a:avLst/>
@@ -3188,173 +3188,6 @@
       <p:sp>
         <p:nvSpPr>
           <p:cNvPr id="1" name="PlaceHolder 2"/>
-          <p:cNvSpPr>
-            <a:spLocks noGrp="1"/>
-          </p:cNvSpPr>
-          <p:nvPr>
-            <p:ph type="ftr" idx="1"/>
-          </p:nvPr>
-        </p:nvSpPr>
-        <p:spPr>
-          <a:xfrm>
-            <a:off x="3029040" y="4767120"/>
-            <a:ext cx="3085560" cy="273240"/>
-          </a:xfrm>
-          <a:prstGeom prst="rect">
-            <a:avLst/>
-          </a:prstGeom>
-          <a:noFill/>
-          <a:ln w="0">
-            <a:noFill/>
-          </a:ln>
-        </p:spPr>
-        <p:txBody>
-          <a:bodyPr lIns="90000" rIns="90000" tIns="45000" bIns="45000" anchor="ctr">
-            <a:noAutofit/>
-          </a:bodyPr>
-          <a:lstStyle>
-            <a:lvl1pPr algn="ctr">
-              <a:lnSpc>
-                <a:spcPct val="100000"/>
-              </a:lnSpc>
-              <a:buNone/>
-              <a:defRPr b="0" lang="en-US" sz="1400" spc="-1" strike="noStrike">
-                <a:latin typeface="Times New Roman"/>
-              </a:defRPr>
-            </a:lvl1pPr>
-          </a:lstStyle>
-          <a:p>
-            <a:pPr algn="ctr">
-              <a:lnSpc>
-                <a:spcPct val="100000"/>
-              </a:lnSpc>
-              <a:buNone/>
-            </a:pPr>
-            <a:r>
-              <a:rPr b="0" lang="en-US" sz="1400" spc="-1" strike="noStrike">
-                <a:latin typeface="Times New Roman"/>
-              </a:rPr>
-              <a:t>&lt;footer&gt;</a:t>
-            </a:r>
-            <a:endParaRPr b="0" lang="en-US" sz="1400" spc="-1" strike="noStrike">
-              <a:latin typeface="Times New Roman"/>
-            </a:endParaRPr>
-          </a:p>
-        </p:txBody>
-      </p:sp>
-      <p:sp>
-        <p:nvSpPr>
-          <p:cNvPr id="2" name="PlaceHolder 3"/>
-          <p:cNvSpPr>
-            <a:spLocks noGrp="1"/>
-          </p:cNvSpPr>
-          <p:nvPr>
-            <p:ph type="sldNum" idx="2"/>
-          </p:nvPr>
-        </p:nvSpPr>
-        <p:spPr>
-          <a:xfrm>
-            <a:off x="6458040" y="4767120"/>
-            <a:ext cx="2056680" cy="273240"/>
-          </a:xfrm>
-          <a:prstGeom prst="rect">
-            <a:avLst/>
-          </a:prstGeom>
-          <a:noFill/>
-          <a:ln w="0">
-            <a:noFill/>
-          </a:ln>
-        </p:spPr>
-        <p:txBody>
-          <a:bodyPr lIns="90000" rIns="90000" tIns="45000" bIns="45000" anchor="ctr">
-            <a:noAutofit/>
-          </a:bodyPr>
-          <a:lstStyle>
-            <a:lvl1pPr algn="r">
-              <a:lnSpc>
-                <a:spcPct val="100000"/>
-              </a:lnSpc>
-              <a:buNone/>
-              <a:defRPr b="0" lang="en-US" sz="900" spc="-1" strike="noStrike">
-                <a:solidFill>
-                  <a:srgbClr val="8b8b8b"/>
-                </a:solidFill>
-                <a:latin typeface="Calibri"/>
-              </a:defRPr>
-            </a:lvl1pPr>
-          </a:lstStyle>
-          <a:p>
-            <a:pPr algn="r">
-              <a:lnSpc>
-                <a:spcPct val="100000"/>
-              </a:lnSpc>
-              <a:buNone/>
-            </a:pPr>
-            <a:fld id="{8C83F6C0-9789-42A4-9630-4936A3D5B3FD}" type="slidenum">
-              <a:rPr b="0" lang="en-US" sz="900" spc="-1" strike="noStrike">
-                <a:solidFill>
-                  <a:srgbClr val="8b8b8b"/>
-                </a:solidFill>
-                <a:latin typeface="Calibri"/>
-              </a:rPr>
-              <a:t>&lt;number&gt;</a:t>
-            </a:fld>
-            <a:endParaRPr b="0" lang="en-US" sz="900" spc="-1" strike="noStrike">
-              <a:latin typeface="Times New Roman"/>
-            </a:endParaRPr>
-          </a:p>
-        </p:txBody>
-      </p:sp>
-      <p:sp>
-        <p:nvSpPr>
-          <p:cNvPr id="3" name="PlaceHolder 4"/>
-          <p:cNvSpPr>
-            <a:spLocks noGrp="1"/>
-          </p:cNvSpPr>
-          <p:nvPr>
-            <p:ph type="dt" idx="3"/>
-          </p:nvPr>
-        </p:nvSpPr>
-        <p:spPr>
-          <a:xfrm>
-            <a:off x="628560" y="4767120"/>
-            <a:ext cx="2056680" cy="273240"/>
-          </a:xfrm>
-          <a:prstGeom prst="rect">
-            <a:avLst/>
-          </a:prstGeom>
-          <a:noFill/>
-          <a:ln w="0">
-            <a:noFill/>
-          </a:ln>
-        </p:spPr>
-        <p:txBody>
-          <a:bodyPr lIns="90000" rIns="90000" tIns="45000" bIns="45000" anchor="ctr">
-            <a:noAutofit/>
-          </a:bodyPr>
-          <a:lstStyle>
-            <a:lvl1pPr>
-              <a:defRPr b="0" lang="en-US" sz="1400" spc="-1" strike="noStrike">
-                <a:latin typeface="Times New Roman"/>
-              </a:defRPr>
-            </a:lvl1pPr>
-          </a:lstStyle>
-          <a:p>
-            <a:r>
-              <a:rPr b="0" lang="en-US" sz="1400" spc="-1" strike="noStrike">
-                <a:latin typeface="Times New Roman"/>
-              </a:rPr>
-              <a:t>&lt;date/time&gt;</a:t>
-            </a:r>
-            <a:endParaRPr b="0" lang="en-US" sz="1400" spc="-1" strike="noStrike">
-              <a:latin typeface="Times New Roman"/>
-            </a:endParaRPr>
-          </a:p>
-        </p:txBody>
-      </p:sp>
-      <p:sp>
-        <p:nvSpPr>
-          <p:cNvPr id="4" name="PlaceHolder 5"/>
           <p:cNvSpPr>
             <a:spLocks noGrp="1"/>
           </p:cNvSpPr>
@@ -3365,7 +3198,7 @@
         <p:spPr>
           <a:xfrm>
             <a:off x="457200" y="1203480"/>
-            <a:ext cx="8229240" cy="2982960"/>
+            <a:ext cx="8228880" cy="2982600"/>
           </a:xfrm>
           <a:prstGeom prst="rect">
             <a:avLst/>
@@ -3392,12 +3225,12 @@
               <a:buChar char=""/>
             </a:pPr>
             <a:r>
-              <a:rPr b="0" lang="en-US" sz="3200" spc="-1" strike="noStrike">
+              <a:rPr b="0" lang="en-US" sz="1800" spc="-1" strike="noStrike">
                 <a:latin typeface="Arial"/>
               </a:rPr>
               <a:t>Click to edit the outline text format</a:t>
             </a:r>
-            <a:endParaRPr b="0" lang="en-US" sz="3200" spc="-1" strike="noStrike">
+            <a:endParaRPr b="0" lang="en-US" sz="1800" spc="-1" strike="noStrike">
               <a:latin typeface="Arial"/>
             </a:endParaRPr>
           </a:p>
@@ -3414,12 +3247,12 @@
               <a:buChar char=""/>
             </a:pPr>
             <a:r>
-              <a:rPr b="0" lang="en-US" sz="2800" spc="-1" strike="noStrike">
+              <a:rPr b="0" lang="en-US" sz="1800" spc="-1" strike="noStrike">
                 <a:latin typeface="Arial"/>
               </a:rPr>
               <a:t>Second Outline Level</a:t>
             </a:r>
-            <a:endParaRPr b="0" lang="en-US" sz="2800" spc="-1" strike="noStrike">
+            <a:endParaRPr b="0" lang="en-US" sz="1800" spc="-1" strike="noStrike">
               <a:latin typeface="Arial"/>
             </a:endParaRPr>
           </a:p>
@@ -3436,12 +3269,12 @@
               <a:buChar char=""/>
             </a:pPr>
             <a:r>
-              <a:rPr b="0" lang="en-US" sz="2400" spc="-1" strike="noStrike">
+              <a:rPr b="0" lang="en-US" sz="1800" spc="-1" strike="noStrike">
                 <a:latin typeface="Arial"/>
               </a:rPr>
               <a:t>Third Outline Level</a:t>
             </a:r>
-            <a:endParaRPr b="0" lang="en-US" sz="2400" spc="-1" strike="noStrike">
+            <a:endParaRPr b="0" lang="en-US" sz="1800" spc="-1" strike="noStrike">
               <a:latin typeface="Arial"/>
             </a:endParaRPr>
           </a:p>
@@ -3458,12 +3291,12 @@
               <a:buChar char=""/>
             </a:pPr>
             <a:r>
-              <a:rPr b="0" lang="en-US" sz="2000" spc="-1" strike="noStrike">
+              <a:rPr b="0" lang="en-US" sz="1800" spc="-1" strike="noStrike">
                 <a:latin typeface="Arial"/>
               </a:rPr>
               <a:t>Fourth Outline Level</a:t>
             </a:r>
-            <a:endParaRPr b="0" lang="en-US" sz="2000" spc="-1" strike="noStrike">
+            <a:endParaRPr b="0" lang="en-US" sz="1800" spc="-1" strike="noStrike">
               <a:latin typeface="Arial"/>
             </a:endParaRPr>
           </a:p>
@@ -3480,12 +3313,12 @@
               <a:buChar char=""/>
             </a:pPr>
             <a:r>
-              <a:rPr b="0" lang="en-US" sz="2000" spc="-1" strike="noStrike">
+              <a:rPr b="0" lang="en-US" sz="1800" spc="-1" strike="noStrike">
                 <a:latin typeface="Arial"/>
               </a:rPr>
               <a:t>Fifth Outline Level</a:t>
             </a:r>
-            <a:endParaRPr b="0" lang="en-US" sz="2000" spc="-1" strike="noStrike">
+            <a:endParaRPr b="0" lang="en-US" sz="1800" spc="-1" strike="noStrike">
               <a:latin typeface="Arial"/>
             </a:endParaRPr>
           </a:p>
@@ -3502,12 +3335,12 @@
               <a:buChar char=""/>
             </a:pPr>
             <a:r>
-              <a:rPr b="0" lang="en-US" sz="2000" spc="-1" strike="noStrike">
+              <a:rPr b="0" lang="en-US" sz="1800" spc="-1" strike="noStrike">
                 <a:latin typeface="Arial"/>
               </a:rPr>
               <a:t>Sixth Outline Level</a:t>
             </a:r>
-            <a:endParaRPr b="0" lang="en-US" sz="2000" spc="-1" strike="noStrike">
+            <a:endParaRPr b="0" lang="en-US" sz="1800" spc="-1" strike="noStrike">
               <a:latin typeface="Arial"/>
             </a:endParaRPr>
           </a:p>
@@ -3524,13 +3357,180 @@
               <a:buChar char=""/>
             </a:pPr>
             <a:r>
-              <a:rPr b="0" lang="en-US" sz="2000" spc="-1" strike="noStrike">
+              <a:rPr b="0" lang="en-US" sz="1800" spc="-1" strike="noStrike">
                 <a:latin typeface="Arial"/>
               </a:rPr>
               <a:t>Seventh Outline Level</a:t>
             </a:r>
-            <a:endParaRPr b="0" lang="en-US" sz="2000" spc="-1" strike="noStrike">
-              <a:latin typeface="Arial"/>
+            <a:endParaRPr b="0" lang="en-US" sz="1800" spc="-1" strike="noStrike">
+              <a:latin typeface="Arial"/>
+            </a:endParaRPr>
+          </a:p>
+        </p:txBody>
+      </p:sp>
+      <p:sp>
+        <p:nvSpPr>
+          <p:cNvPr id="2" name="PlaceHolder 3"/>
+          <p:cNvSpPr>
+            <a:spLocks noGrp="1"/>
+          </p:cNvSpPr>
+          <p:nvPr>
+            <p:ph type="ftr" idx="1"/>
+          </p:nvPr>
+        </p:nvSpPr>
+        <p:spPr>
+          <a:xfrm>
+            <a:off x="3029040" y="4767120"/>
+            <a:ext cx="3085200" cy="272880"/>
+          </a:xfrm>
+          <a:prstGeom prst="rect">
+            <a:avLst/>
+          </a:prstGeom>
+          <a:noFill/>
+          <a:ln w="0">
+            <a:noFill/>
+          </a:ln>
+        </p:spPr>
+        <p:txBody>
+          <a:bodyPr lIns="90000" rIns="90000" tIns="45000" bIns="45000" anchor="ctr">
+            <a:noAutofit/>
+          </a:bodyPr>
+          <a:lstStyle>
+            <a:lvl1pPr algn="ctr">
+              <a:lnSpc>
+                <a:spcPct val="100000"/>
+              </a:lnSpc>
+              <a:buNone/>
+              <a:defRPr b="0" lang="en-US" sz="1400" spc="-1" strike="noStrike">
+                <a:latin typeface="Times New Roman"/>
+              </a:defRPr>
+            </a:lvl1pPr>
+          </a:lstStyle>
+          <a:p>
+            <a:pPr algn="ctr">
+              <a:lnSpc>
+                <a:spcPct val="100000"/>
+              </a:lnSpc>
+              <a:buNone/>
+            </a:pPr>
+            <a:r>
+              <a:rPr b="0" lang="en-US" sz="1400" spc="-1" strike="noStrike">
+                <a:latin typeface="Times New Roman"/>
+              </a:rPr>
+              <a:t>&lt;footer&gt;</a:t>
+            </a:r>
+            <a:endParaRPr b="0" lang="en-US" sz="1400" spc="-1" strike="noStrike">
+              <a:latin typeface="Times New Roman"/>
+            </a:endParaRPr>
+          </a:p>
+        </p:txBody>
+      </p:sp>
+      <p:sp>
+        <p:nvSpPr>
+          <p:cNvPr id="3" name="PlaceHolder 4"/>
+          <p:cNvSpPr>
+            <a:spLocks noGrp="1"/>
+          </p:cNvSpPr>
+          <p:nvPr>
+            <p:ph type="sldNum" idx="2"/>
+          </p:nvPr>
+        </p:nvSpPr>
+        <p:spPr>
+          <a:xfrm>
+            <a:off x="6458040" y="4767120"/>
+            <a:ext cx="2056320" cy="272880"/>
+          </a:xfrm>
+          <a:prstGeom prst="rect">
+            <a:avLst/>
+          </a:prstGeom>
+          <a:noFill/>
+          <a:ln w="0">
+            <a:noFill/>
+          </a:ln>
+        </p:spPr>
+        <p:txBody>
+          <a:bodyPr lIns="90000" rIns="90000" tIns="45000" bIns="45000" anchor="ctr">
+            <a:noAutofit/>
+          </a:bodyPr>
+          <a:lstStyle>
+            <a:lvl1pPr algn="r">
+              <a:lnSpc>
+                <a:spcPct val="100000"/>
+              </a:lnSpc>
+              <a:buNone/>
+              <a:defRPr b="0" lang="en-US" sz="900" spc="-1" strike="noStrike">
+                <a:solidFill>
+                  <a:srgbClr val="8b8b8b"/>
+                </a:solidFill>
+                <a:latin typeface="Calibri"/>
+              </a:defRPr>
+            </a:lvl1pPr>
+          </a:lstStyle>
+          <a:p>
+            <a:pPr algn="r">
+              <a:lnSpc>
+                <a:spcPct val="100000"/>
+              </a:lnSpc>
+              <a:buNone/>
+            </a:pPr>
+            <a:fld id="{7180905E-C2EF-49DF-82A2-5EF53BCC3C0F}" type="slidenum">
+              <a:rPr b="0" lang="en-US" sz="900" spc="-1" strike="noStrike">
+                <a:solidFill>
+                  <a:srgbClr val="8b8b8b"/>
+                </a:solidFill>
+                <a:latin typeface="Calibri"/>
+              </a:rPr>
+              <a:t>&lt;number&gt;</a:t>
+            </a:fld>
+            <a:endParaRPr b="0" lang="en-US" sz="900" spc="-1" strike="noStrike">
+              <a:latin typeface="Times New Roman"/>
+            </a:endParaRPr>
+          </a:p>
+        </p:txBody>
+      </p:sp>
+      <p:sp>
+        <p:nvSpPr>
+          <p:cNvPr id="4" name="PlaceHolder 5"/>
+          <p:cNvSpPr>
+            <a:spLocks noGrp="1"/>
+          </p:cNvSpPr>
+          <p:nvPr>
+            <p:ph type="dt" idx="3"/>
+          </p:nvPr>
+        </p:nvSpPr>
+        <p:spPr>
+          <a:xfrm>
+            <a:off x="628560" y="4767120"/>
+            <a:ext cx="2056320" cy="272880"/>
+          </a:xfrm>
+          <a:prstGeom prst="rect">
+            <a:avLst/>
+          </a:prstGeom>
+          <a:noFill/>
+          <a:ln w="0">
+            <a:noFill/>
+          </a:ln>
+        </p:spPr>
+        <p:txBody>
+          <a:bodyPr lIns="90000" rIns="90000" tIns="45000" bIns="45000" anchor="ctr">
+            <a:noAutofit/>
+          </a:bodyPr>
+          <a:lstStyle>
+            <a:lvl1pPr>
+              <a:defRPr b="0" lang="en-US" sz="1400" spc="-1" strike="noStrike">
+                <a:latin typeface="Times New Roman"/>
+              </a:defRPr>
+            </a:lvl1pPr>
+          </a:lstStyle>
+          <a:p>
+            <a:r>
+              <a:rPr b="0" lang="en-US" sz="1400" spc="-1" strike="noStrike">
+                <a:latin typeface="Times New Roman"/>
+              </a:rPr>
+              <a:t>&lt;date/time&gt;</a:t>
+            </a:r>
+            <a:endParaRPr b="0" lang="en-US" sz="1400" spc="-1" strike="noStrike">
+              <a:latin typeface="Times New Roman"/>
             </a:endParaRPr>
           </a:p>
         </p:txBody>
@@ -3581,7 +3581,7 @@
         <p:spPr>
           <a:xfrm>
             <a:off x="186840" y="178200"/>
-            <a:ext cx="8769960" cy="4757760"/>
+            <a:ext cx="8769600" cy="4757400"/>
           </a:xfrm>
           <a:prstGeom prst="roundRect">
             <a:avLst>
@@ -3619,7 +3619,7 @@
         <p:spPr>
           <a:xfrm>
             <a:off x="460080" y="622080"/>
-            <a:ext cx="6925680" cy="3306600"/>
+            <a:ext cx="6925320" cy="3306240"/>
           </a:xfrm>
           <a:prstGeom prst="rect">
             <a:avLst/>
@@ -3675,7 +3675,7 @@
         <p:spPr>
           <a:xfrm>
             <a:off x="5753880" y="2557440"/>
-            <a:ext cx="4009680" cy="3133080"/>
+            <a:ext cx="4009320" cy="3132720"/>
           </a:xfrm>
           <a:prstGeom prst="rect">
             <a:avLst/>
@@ -3724,7 +3724,7 @@
         <p:spPr>
           <a:xfrm>
             <a:off x="0" y="-478800"/>
-            <a:ext cx="9143280" cy="1765800"/>
+            <a:ext cx="9142920" cy="1765440"/>
           </a:xfrm>
           <a:prstGeom prst="roundRect">
             <a:avLst>
@@ -3762,7 +3762,7 @@
         <p:spPr>
           <a:xfrm>
             <a:off x="384840" y="1726200"/>
-            <a:ext cx="2664720" cy="713520"/>
+            <a:ext cx="2664360" cy="713160"/>
           </a:xfrm>
           <a:prstGeom prst="rect">
             <a:avLst/>
@@ -3814,7 +3814,7 @@
         <p:spPr>
           <a:xfrm>
             <a:off x="384840" y="2611080"/>
-            <a:ext cx="2664720" cy="1564920"/>
+            <a:ext cx="2664360" cy="1564560"/>
           </a:xfrm>
           <a:prstGeom prst="rect">
             <a:avLst/>
@@ -3876,7 +3876,7 @@
         <p:spPr>
           <a:xfrm>
             <a:off x="3239280" y="1726200"/>
-            <a:ext cx="2664720" cy="713520"/>
+            <a:ext cx="2664360" cy="713160"/>
           </a:xfrm>
           <a:prstGeom prst="rect">
             <a:avLst/>
@@ -3928,7 +3928,7 @@
         <p:spPr>
           <a:xfrm>
             <a:off x="3239280" y="2611080"/>
-            <a:ext cx="2664720" cy="1564920"/>
+            <a:ext cx="2664360" cy="1564560"/>
           </a:xfrm>
           <a:prstGeom prst="rect">
             <a:avLst/>
@@ -3990,7 +3990,7 @@
         <p:spPr>
           <a:xfrm>
             <a:off x="6093720" y="1726200"/>
-            <a:ext cx="2664720" cy="713520"/>
+            <a:ext cx="2664360" cy="713160"/>
           </a:xfrm>
           <a:prstGeom prst="rect">
             <a:avLst/>
@@ -4042,7 +4042,7 @@
         <p:spPr>
           <a:xfrm>
             <a:off x="6093720" y="2611080"/>
-            <a:ext cx="2664720" cy="1564920"/>
+            <a:ext cx="2664360" cy="1564560"/>
           </a:xfrm>
           <a:prstGeom prst="rect">
             <a:avLst/>
@@ -4203,7 +4203,7 @@
         <p:spPr>
           <a:xfrm>
             <a:off x="8519760" y="4831560"/>
-            <a:ext cx="484560" cy="226800"/>
+            <a:ext cx="484200" cy="226800"/>
           </a:xfrm>
           <a:prstGeom prst="rect">
             <a:avLst/>
@@ -4255,7 +4255,7 @@
         <p:spPr>
           <a:xfrm>
             <a:off x="313200" y="156600"/>
-            <a:ext cx="8457840" cy="757440"/>
+            <a:ext cx="8457480" cy="757080"/>
           </a:xfrm>
           <a:prstGeom prst="rect">
             <a:avLst/>
@@ -4284,7 +4284,11 @@
             </a:pPr>
             <a:r>
               <a:rPr b="0" lang="en-US" sz="1800" spc="-1" strike="noStrike">
-                <a:latin typeface="Arial"/>
+                <a:solidFill>
+                  <a:srgbClr val="000000"/>
+                </a:solidFill>
+                <a:latin typeface="Arial"/>
+                <a:ea typeface="DejaVu Sans"/>
               </a:rPr>
               <a:t>TITLE</a:t>
             </a:r>
@@ -4333,7 +4337,7 @@
         <p:spPr>
           <a:xfrm>
             <a:off x="384840" y="3271680"/>
-            <a:ext cx="5236200" cy="1320840"/>
+            <a:ext cx="5235840" cy="1320480"/>
           </a:xfrm>
           <a:prstGeom prst="roundRect">
             <a:avLst>
@@ -4371,7 +4375,7 @@
         <p:spPr>
           <a:xfrm>
             <a:off x="3091680" y="1028880"/>
-            <a:ext cx="2532960" cy="2056680"/>
+            <a:ext cx="2532600" cy="2056320"/>
           </a:xfrm>
           <a:prstGeom prst="roundRect">
             <a:avLst>
@@ -4409,7 +4413,7 @@
         <p:spPr>
           <a:xfrm>
             <a:off x="387720" y="1014480"/>
-            <a:ext cx="2532960" cy="2056680"/>
+            <a:ext cx="2532600" cy="2056320"/>
           </a:xfrm>
           <a:prstGeom prst="roundRect">
             <a:avLst>
@@ -4447,7 +4451,7 @@
         <p:spPr>
           <a:xfrm>
             <a:off x="479880" y="1059120"/>
-            <a:ext cx="2343240" cy="713520"/>
+            <a:ext cx="2342880" cy="713160"/>
           </a:xfrm>
           <a:prstGeom prst="rect">
             <a:avLst/>
@@ -4509,7 +4513,7 @@
         <p:spPr>
           <a:xfrm>
             <a:off x="479880" y="1843560"/>
-            <a:ext cx="2343240" cy="1141920"/>
+            <a:ext cx="2342880" cy="1141560"/>
           </a:xfrm>
           <a:prstGeom prst="rect">
             <a:avLst/>
@@ -4571,7 +4575,7 @@
         <p:spPr>
           <a:xfrm>
             <a:off x="3183120" y="1059120"/>
-            <a:ext cx="2340000" cy="713520"/>
+            <a:ext cx="2339640" cy="713160"/>
           </a:xfrm>
           <a:prstGeom prst="rect">
             <a:avLst/>
@@ -4623,7 +4627,7 @@
         <p:spPr>
           <a:xfrm>
             <a:off x="3183120" y="1843560"/>
-            <a:ext cx="2340000" cy="1141920"/>
+            <a:ext cx="2339640" cy="1141560"/>
           </a:xfrm>
           <a:prstGeom prst="rect">
             <a:avLst/>
@@ -4685,7 +4689,7 @@
         <p:spPr>
           <a:xfrm>
             <a:off x="479520" y="3362040"/>
-            <a:ext cx="5236200" cy="328680"/>
+            <a:ext cx="5235840" cy="328320"/>
           </a:xfrm>
           <a:prstGeom prst="rect">
             <a:avLst/>
@@ -4737,7 +4741,7 @@
         <p:spPr>
           <a:xfrm>
             <a:off x="479520" y="3713400"/>
-            <a:ext cx="5146560" cy="713520"/>
+            <a:ext cx="5146200" cy="713160"/>
           </a:xfrm>
           <a:prstGeom prst="rect">
             <a:avLst/>
@@ -4799,7 +4803,7 @@
         <p:spPr>
           <a:xfrm>
             <a:off x="5808240" y="1028880"/>
-            <a:ext cx="3128040" cy="3564000"/>
+            <a:ext cx="3127680" cy="3563640"/>
           </a:xfrm>
           <a:prstGeom prst="roundRect">
             <a:avLst>
@@ -4863,7 +4867,7 @@
         <p:spPr>
           <a:xfrm>
             <a:off x="8519760" y="4831560"/>
-            <a:ext cx="484560" cy="226800"/>
+            <a:ext cx="484200" cy="226800"/>
           </a:xfrm>
           <a:prstGeom prst="rect">
             <a:avLst/>
@@ -4915,7 +4919,7 @@
         <p:spPr>
           <a:xfrm>
             <a:off x="401400" y="239760"/>
-            <a:ext cx="8457840" cy="819000"/>
+            <a:ext cx="8457480" cy="818640"/>
           </a:xfrm>
           <a:prstGeom prst="rect">
             <a:avLst/>
@@ -4944,7 +4948,11 @@
             </a:pPr>
             <a:r>
               <a:rPr b="0" lang="en-US" sz="1800" spc="-1" strike="noStrike">
-                <a:latin typeface="Arial"/>
+                <a:solidFill>
+                  <a:srgbClr val="000000"/>
+                </a:solidFill>
+                <a:latin typeface="Arial"/>
+                <a:ea typeface="DejaVu Sans"/>
               </a:rPr>
               <a:t>TITLE</a:t>
             </a:r>
@@ -4993,7 +5001,7 @@
         <p:spPr>
           <a:xfrm>
             <a:off x="186840" y="178200"/>
-            <a:ext cx="8769960" cy="4757760"/>
+            <a:ext cx="8769600" cy="4757400"/>
           </a:xfrm>
           <a:prstGeom prst="roundRect">
             <a:avLst>
@@ -5031,7 +5039,7 @@
         <p:spPr>
           <a:xfrm>
             <a:off x="460080" y="622080"/>
-            <a:ext cx="6925680" cy="3306600"/>
+            <a:ext cx="6925320" cy="3306240"/>
           </a:xfrm>
           <a:prstGeom prst="rect">
             <a:avLst/>
@@ -5087,7 +5095,7 @@
         <p:spPr>
           <a:xfrm>
             <a:off x="5753880" y="2557440"/>
-            <a:ext cx="4009680" cy="3133080"/>
+            <a:ext cx="4009320" cy="3132720"/>
           </a:xfrm>
           <a:prstGeom prst="rect">
             <a:avLst/>
@@ -5140,7 +5148,7 @@
         <p:spPr>
           <a:xfrm>
             <a:off x="5753880" y="2557440"/>
-            <a:ext cx="4009680" cy="3133080"/>
+            <a:ext cx="4009320" cy="3132720"/>
           </a:xfrm>
           <a:prstGeom prst="rect">
             <a:avLst/>
@@ -5159,7 +5167,7 @@
         <p:spPr>
           <a:xfrm>
             <a:off x="185760" y="831240"/>
-            <a:ext cx="899280" cy="899280"/>
+            <a:ext cx="898920" cy="898920"/>
           </a:xfrm>
           <a:prstGeom prst="ellipse">
             <a:avLst/>
@@ -5219,7 +5227,7 @@
         <p:spPr>
           <a:xfrm>
             <a:off x="185760" y="2381400"/>
-            <a:ext cx="899280" cy="887400"/>
+            <a:ext cx="898920" cy="887040"/>
           </a:xfrm>
           <a:prstGeom prst="ellipse">
             <a:avLst/>
@@ -5279,7 +5287,7 @@
         <p:spPr>
           <a:xfrm>
             <a:off x="185760" y="3860640"/>
-            <a:ext cx="899280" cy="899280"/>
+            <a:ext cx="898920" cy="898920"/>
           </a:xfrm>
           <a:prstGeom prst="ellipse">
             <a:avLst/>
@@ -5339,7 +5347,7 @@
         <p:spPr>
           <a:xfrm>
             <a:off x="967680" y="797040"/>
-            <a:ext cx="3764520" cy="550440"/>
+            <a:ext cx="3764160" cy="550080"/>
           </a:xfrm>
           <a:prstGeom prst="rect">
             <a:avLst/>
@@ -5401,7 +5409,7 @@
         <p:spPr>
           <a:xfrm>
             <a:off x="967680" y="1332720"/>
-            <a:ext cx="3764520" cy="789480"/>
+            <a:ext cx="3764160" cy="789120"/>
           </a:xfrm>
           <a:prstGeom prst="rect">
             <a:avLst/>
@@ -5463,7 +5471,7 @@
         <p:spPr>
           <a:xfrm>
             <a:off x="964080" y="2292480"/>
-            <a:ext cx="3764520" cy="550440"/>
+            <a:ext cx="3764160" cy="550080"/>
           </a:xfrm>
           <a:prstGeom prst="rect">
             <a:avLst/>
@@ -5515,7 +5523,7 @@
         <p:spPr>
           <a:xfrm>
             <a:off x="964080" y="2825280"/>
-            <a:ext cx="3764520" cy="843120"/>
+            <a:ext cx="3764160" cy="842760"/>
           </a:xfrm>
           <a:prstGeom prst="rect">
             <a:avLst/>
@@ -5577,7 +5585,7 @@
         <p:spPr>
           <a:xfrm>
             <a:off x="964080" y="3777840"/>
-            <a:ext cx="3764520" cy="550440"/>
+            <a:ext cx="3764160" cy="550080"/>
           </a:xfrm>
           <a:prstGeom prst="rect">
             <a:avLst/>
@@ -5629,7 +5637,7 @@
         <p:spPr>
           <a:xfrm>
             <a:off x="964080" y="4310640"/>
-            <a:ext cx="3764520" cy="794520"/>
+            <a:ext cx="3764160" cy="794160"/>
           </a:xfrm>
           <a:prstGeom prst="rect">
             <a:avLst/>
@@ -5691,7 +5699,7 @@
         <p:spPr>
           <a:xfrm>
             <a:off x="5084640" y="987840"/>
-            <a:ext cx="3687480" cy="3496680"/>
+            <a:ext cx="3687120" cy="3496320"/>
           </a:xfrm>
           <a:prstGeom prst="roundRect">
             <a:avLst>
@@ -5755,7 +5763,7 @@
         <p:spPr>
           <a:xfrm>
             <a:off x="8519760" y="4831560"/>
-            <a:ext cx="484560" cy="226800"/>
+            <a:ext cx="484200" cy="226800"/>
           </a:xfrm>
           <a:prstGeom prst="rect">
             <a:avLst/>
@@ -5807,7 +5815,7 @@
         <p:spPr>
           <a:xfrm>
             <a:off x="421200" y="228600"/>
-            <a:ext cx="8457840" cy="685440"/>
+            <a:ext cx="8457480" cy="685080"/>
           </a:xfrm>
           <a:prstGeom prst="rect">
             <a:avLst/>
@@ -5836,7 +5844,11 @@
             </a:pPr>
             <a:r>
               <a:rPr b="0" lang="en-US" sz="1800" spc="-1" strike="noStrike">
-                <a:latin typeface="Arial"/>
+                <a:solidFill>
+                  <a:srgbClr val="000000"/>
+                </a:solidFill>
+                <a:latin typeface="Arial"/>
+                <a:ea typeface="DejaVu Sans"/>
               </a:rPr>
               <a:t>TITLE</a:t>
             </a:r>
@@ -5885,7 +5897,7 @@
         <p:spPr>
           <a:xfrm>
             <a:off x="506520" y="1484640"/>
-            <a:ext cx="2556720" cy="2055240"/>
+            <a:ext cx="2556360" cy="2054880"/>
           </a:xfrm>
           <a:prstGeom prst="roundRect">
             <a:avLst>
@@ -5925,7 +5937,7 @@
         <p:spPr>
           <a:xfrm>
             <a:off x="624240" y="1616760"/>
-            <a:ext cx="2289600" cy="729000"/>
+            <a:ext cx="2289240" cy="728640"/>
           </a:xfrm>
           <a:prstGeom prst="rect">
             <a:avLst/>
@@ -5977,7 +5989,7 @@
         <p:spPr>
           <a:xfrm>
             <a:off x="624240" y="2400480"/>
-            <a:ext cx="2289600" cy="1162080"/>
+            <a:ext cx="2289240" cy="1161720"/>
           </a:xfrm>
           <a:prstGeom prst="rect">
             <a:avLst/>
@@ -6039,7 +6051,7 @@
         <p:spPr>
           <a:xfrm>
             <a:off x="3309120" y="2066040"/>
-            <a:ext cx="2556720" cy="2055240"/>
+            <a:ext cx="2556360" cy="2054880"/>
           </a:xfrm>
           <a:prstGeom prst="roundRect">
             <a:avLst>
@@ -6079,7 +6091,7 @@
         <p:spPr>
           <a:xfrm>
             <a:off x="3426840" y="2198160"/>
-            <a:ext cx="2289600" cy="729000"/>
+            <a:ext cx="2289240" cy="728640"/>
           </a:xfrm>
           <a:prstGeom prst="rect">
             <a:avLst/>
@@ -6131,7 +6143,7 @@
         <p:spPr>
           <a:xfrm>
             <a:off x="3426840" y="2981880"/>
-            <a:ext cx="2289600" cy="1162080"/>
+            <a:ext cx="2289240" cy="1161720"/>
           </a:xfrm>
           <a:prstGeom prst="rect">
             <a:avLst/>
@@ -6183,7 +6195,7 @@
         <p:spPr>
           <a:xfrm>
             <a:off x="6111720" y="2659320"/>
-            <a:ext cx="2556720" cy="2055240"/>
+            <a:ext cx="2556360" cy="2054880"/>
           </a:xfrm>
           <a:prstGeom prst="roundRect">
             <a:avLst>
@@ -6223,7 +6235,7 @@
         <p:spPr>
           <a:xfrm>
             <a:off x="6229440" y="2791440"/>
-            <a:ext cx="2289600" cy="729000"/>
+            <a:ext cx="2289240" cy="728640"/>
           </a:xfrm>
           <a:prstGeom prst="rect">
             <a:avLst/>
@@ -6258,7 +6270,7 @@
                 <a:latin typeface="Arial"/>
                 <a:ea typeface="DejaVu Sans"/>
               </a:rPr>
-              <a:t>SUBTITLE2</a:t>
+              <a:t>SUBTITLE3</a:t>
             </a:r>
             <a:endParaRPr b="0" lang="en-US" sz="1400" spc="-1" strike="noStrike">
               <a:latin typeface="Arial"/>
@@ -6275,7 +6287,7 @@
         <p:spPr>
           <a:xfrm>
             <a:off x="6229440" y="3574800"/>
-            <a:ext cx="2289600" cy="1162080"/>
+            <a:ext cx="2289240" cy="1161720"/>
           </a:xfrm>
           <a:prstGeom prst="rect">
             <a:avLst/>
@@ -6310,7 +6322,7 @@
                 <a:latin typeface="Arial"/>
                 <a:ea typeface="DejaVu Sans"/>
               </a:rPr>
-              <a:t>TEXT2</a:t>
+              <a:t>TEXT3</a:t>
             </a:r>
             <a:endParaRPr b="0" lang="en-US" sz="1100" spc="-1" strike="noStrike">
               <a:latin typeface="Arial"/>
@@ -6327,7 +6339,7 @@
         <p:spPr>
           <a:xfrm>
             <a:off x="8519760" y="4831560"/>
-            <a:ext cx="484560" cy="226800"/>
+            <a:ext cx="484200" cy="226800"/>
           </a:xfrm>
           <a:prstGeom prst="rect">
             <a:avLst/>
@@ -6379,7 +6391,7 @@
         <p:spPr>
           <a:xfrm>
             <a:off x="457200" y="228600"/>
-            <a:ext cx="8229240" cy="1142640"/>
+            <a:ext cx="8228880" cy="1142280"/>
           </a:xfrm>
           <a:prstGeom prst="rect">
             <a:avLst/>
@@ -6408,7 +6420,11 @@
             </a:pPr>
             <a:r>
               <a:rPr b="0" lang="en-US" sz="1800" spc="-1" strike="noStrike">
-                <a:latin typeface="Arial"/>
+                <a:solidFill>
+                  <a:srgbClr val="000000"/>
+                </a:solidFill>
+                <a:latin typeface="Arial"/>
+                <a:ea typeface="DejaVu Sans"/>
               </a:rPr>
               <a:t>TITLE</a:t>
             </a:r>
@@ -6457,7 +6473,7 @@
         <p:spPr>
           <a:xfrm>
             <a:off x="3601800" y="3271680"/>
-            <a:ext cx="5236200" cy="1320840"/>
+            <a:ext cx="5235840" cy="1320480"/>
           </a:xfrm>
           <a:prstGeom prst="roundRect">
             <a:avLst>
@@ -6495,7 +6511,7 @@
         <p:spPr>
           <a:xfrm>
             <a:off x="6308640" y="1028880"/>
-            <a:ext cx="2532960" cy="2056680"/>
+            <a:ext cx="2532600" cy="2056320"/>
           </a:xfrm>
           <a:prstGeom prst="roundRect">
             <a:avLst>
@@ -6533,7 +6549,7 @@
         <p:spPr>
           <a:xfrm>
             <a:off x="3604320" y="1014480"/>
-            <a:ext cx="2532960" cy="2056680"/>
+            <a:ext cx="2532600" cy="2056320"/>
           </a:xfrm>
           <a:prstGeom prst="roundRect">
             <a:avLst>
@@ -6571,7 +6587,7 @@
         <p:spPr>
           <a:xfrm>
             <a:off x="3696480" y="1059120"/>
-            <a:ext cx="2343240" cy="713520"/>
+            <a:ext cx="2342880" cy="713160"/>
           </a:xfrm>
           <a:prstGeom prst="rect">
             <a:avLst/>
@@ -6633,7 +6649,7 @@
         <p:spPr>
           <a:xfrm>
             <a:off x="3696480" y="1843560"/>
-            <a:ext cx="2343240" cy="1141920"/>
+            <a:ext cx="2342880" cy="1141560"/>
           </a:xfrm>
           <a:prstGeom prst="rect">
             <a:avLst/>
@@ -6695,7 +6711,7 @@
         <p:spPr>
           <a:xfrm>
             <a:off x="6400080" y="1059120"/>
-            <a:ext cx="2340000" cy="713520"/>
+            <a:ext cx="2339640" cy="713160"/>
           </a:xfrm>
           <a:prstGeom prst="rect">
             <a:avLst/>
@@ -6747,7 +6763,7 @@
         <p:spPr>
           <a:xfrm>
             <a:off x="6400080" y="1843560"/>
-            <a:ext cx="2340000" cy="1141920"/>
+            <a:ext cx="2339640" cy="1141560"/>
           </a:xfrm>
           <a:prstGeom prst="rect">
             <a:avLst/>
@@ -6809,7 +6825,7 @@
         <p:spPr>
           <a:xfrm>
             <a:off x="3696480" y="3362040"/>
-            <a:ext cx="5236200" cy="328680"/>
+            <a:ext cx="5235840" cy="328320"/>
           </a:xfrm>
           <a:prstGeom prst="rect">
             <a:avLst/>
@@ -6861,7 +6877,7 @@
         <p:spPr>
           <a:xfrm>
             <a:off x="3696480" y="3713400"/>
-            <a:ext cx="5146560" cy="713520"/>
+            <a:ext cx="5146200" cy="713160"/>
           </a:xfrm>
           <a:prstGeom prst="rect">
             <a:avLst/>
@@ -6923,7 +6939,7 @@
         <p:spPr>
           <a:xfrm>
             <a:off x="384840" y="1028880"/>
-            <a:ext cx="3002400" cy="3564000"/>
+            <a:ext cx="3002040" cy="3563640"/>
           </a:xfrm>
           <a:prstGeom prst="roundRect">
             <a:avLst>
@@ -6987,7 +7003,7 @@
         <p:spPr>
           <a:xfrm>
             <a:off x="8519760" y="4831560"/>
-            <a:ext cx="484560" cy="226800"/>
+            <a:ext cx="484200" cy="226800"/>
           </a:xfrm>
           <a:prstGeom prst="rect">
             <a:avLst/>
@@ -7039,7 +7055,7 @@
         <p:spPr>
           <a:xfrm>
             <a:off x="313200" y="228600"/>
-            <a:ext cx="8457840" cy="685440"/>
+            <a:ext cx="8457480" cy="685080"/>
           </a:xfrm>
           <a:prstGeom prst="rect">
             <a:avLst/>
@@ -7068,7 +7084,11 @@
             </a:pPr>
             <a:r>
               <a:rPr b="0" lang="en-US" sz="1800" spc="-1" strike="noStrike">
-                <a:latin typeface="Arial"/>
+                <a:solidFill>
+                  <a:srgbClr val="000000"/>
+                </a:solidFill>
+                <a:latin typeface="Arial"/>
+                <a:ea typeface="DejaVu Sans"/>
               </a:rPr>
               <a:t>TITLE</a:t>
             </a:r>
@@ -7121,7 +7141,7 @@
         <p:spPr>
           <a:xfrm>
             <a:off x="-877680" y="2245320"/>
-            <a:ext cx="4613040" cy="3604680"/>
+            <a:ext cx="4612680" cy="3604320"/>
           </a:xfrm>
           <a:prstGeom prst="rect">
             <a:avLst/>
@@ -7140,7 +7160,7 @@
         <p:spPr>
           <a:xfrm>
             <a:off x="4157640" y="631080"/>
-            <a:ext cx="899280" cy="899280"/>
+            <a:ext cx="898920" cy="898920"/>
           </a:xfrm>
           <a:prstGeom prst="ellipse">
             <a:avLst/>
@@ -7202,7 +7222,7 @@
         <p:spPr>
           <a:xfrm>
             <a:off x="4157640" y="2127600"/>
-            <a:ext cx="899280" cy="887400"/>
+            <a:ext cx="898920" cy="887040"/>
           </a:xfrm>
           <a:prstGeom prst="ellipse">
             <a:avLst/>
@@ -7264,7 +7284,7 @@
         <p:spPr>
           <a:xfrm>
             <a:off x="4157640" y="3612240"/>
-            <a:ext cx="899280" cy="899280"/>
+            <a:ext cx="898920" cy="898920"/>
           </a:xfrm>
           <a:prstGeom prst="ellipse">
             <a:avLst/>
@@ -7326,7 +7346,7 @@
         <p:spPr>
           <a:xfrm>
             <a:off x="5146560" y="489600"/>
-            <a:ext cx="3578760" cy="550440"/>
+            <a:ext cx="3578400" cy="550080"/>
           </a:xfrm>
           <a:prstGeom prst="rect">
             <a:avLst/>
@@ -7388,7 +7408,7 @@
         <p:spPr>
           <a:xfrm>
             <a:off x="5146560" y="1025280"/>
-            <a:ext cx="3578760" cy="789480"/>
+            <a:ext cx="3578400" cy="789120"/>
           </a:xfrm>
           <a:prstGeom prst="rect">
             <a:avLst/>
@@ -7450,7 +7470,7 @@
         <p:spPr>
           <a:xfrm>
             <a:off x="5142960" y="1985400"/>
-            <a:ext cx="3578760" cy="550440"/>
+            <a:ext cx="3578400" cy="550080"/>
           </a:xfrm>
           <a:prstGeom prst="rect">
             <a:avLst/>
@@ -7502,7 +7522,7 @@
         <p:spPr>
           <a:xfrm>
             <a:off x="5142960" y="2517840"/>
-            <a:ext cx="3578760" cy="843120"/>
+            <a:ext cx="3578400" cy="842760"/>
           </a:xfrm>
           <a:prstGeom prst="rect">
             <a:avLst/>
@@ -7564,7 +7584,7 @@
         <p:spPr>
           <a:xfrm>
             <a:off x="5142960" y="3470760"/>
-            <a:ext cx="3578760" cy="550440"/>
+            <a:ext cx="3578400" cy="550080"/>
           </a:xfrm>
           <a:prstGeom prst="rect">
             <a:avLst/>
@@ -7616,7 +7636,7 @@
         <p:spPr>
           <a:xfrm>
             <a:off x="5142960" y="4003560"/>
-            <a:ext cx="3578760" cy="794520"/>
+            <a:ext cx="3578400" cy="794160"/>
           </a:xfrm>
           <a:prstGeom prst="rect">
             <a:avLst/>
@@ -7678,7 +7698,7 @@
         <p:spPr>
           <a:xfrm>
             <a:off x="8519760" y="4831560"/>
-            <a:ext cx="484560" cy="226800"/>
+            <a:ext cx="484200" cy="226800"/>
           </a:xfrm>
           <a:prstGeom prst="rect">
             <a:avLst/>
@@ -7730,7 +7750,7 @@
         <p:spPr>
           <a:xfrm>
             <a:off x="264600" y="228600"/>
-            <a:ext cx="3657240" cy="2016360"/>
+            <a:ext cx="3656880" cy="2016000"/>
           </a:xfrm>
           <a:prstGeom prst="rect">
             <a:avLst/>
@@ -7759,7 +7779,11 @@
             </a:pPr>
             <a:r>
               <a:rPr b="0" lang="en-US" sz="1800" spc="-1" strike="noStrike">
-                <a:latin typeface="Arial"/>
+                <a:solidFill>
+                  <a:srgbClr val="000000"/>
+                </a:solidFill>
+                <a:latin typeface="Arial"/>
+                <a:ea typeface="DejaVu Sans"/>
               </a:rPr>
               <a:t>TITLE</a:t>
             </a:r>
@@ -7808,7 +7832,7 @@
         <p:spPr>
           <a:xfrm>
             <a:off x="4238640" y="831240"/>
-            <a:ext cx="899280" cy="899280"/>
+            <a:ext cx="898920" cy="898920"/>
           </a:xfrm>
           <a:prstGeom prst="ellipse">
             <a:avLst/>
@@ -7868,7 +7892,7 @@
         <p:spPr>
           <a:xfrm>
             <a:off x="4238640" y="2243880"/>
-            <a:ext cx="899280" cy="887400"/>
+            <a:ext cx="898920" cy="887040"/>
           </a:xfrm>
           <a:prstGeom prst="ellipse">
             <a:avLst/>
@@ -7928,7 +7952,7 @@
         <p:spPr>
           <a:xfrm>
             <a:off x="4238640" y="3667320"/>
-            <a:ext cx="899280" cy="899280"/>
+            <a:ext cx="898920" cy="898920"/>
           </a:xfrm>
           <a:prstGeom prst="ellipse">
             <a:avLst/>
@@ -7988,7 +8012,7 @@
         <p:spPr>
           <a:xfrm>
             <a:off x="5020200" y="797040"/>
-            <a:ext cx="3764520" cy="550440"/>
+            <a:ext cx="3764160" cy="550080"/>
           </a:xfrm>
           <a:prstGeom prst="rect">
             <a:avLst/>
@@ -8050,7 +8074,7 @@
         <p:spPr>
           <a:xfrm>
             <a:off x="5020200" y="1332720"/>
-            <a:ext cx="3764520" cy="789480"/>
+            <a:ext cx="3764160" cy="789120"/>
           </a:xfrm>
           <a:prstGeom prst="rect">
             <a:avLst/>
@@ -8112,7 +8136,7 @@
         <p:spPr>
           <a:xfrm>
             <a:off x="5016600" y="2155320"/>
-            <a:ext cx="3764520" cy="550440"/>
+            <a:ext cx="3764160" cy="550080"/>
           </a:xfrm>
           <a:prstGeom prst="rect">
             <a:avLst/>
@@ -8164,7 +8188,7 @@
         <p:spPr>
           <a:xfrm>
             <a:off x="5016600" y="2687760"/>
-            <a:ext cx="3764520" cy="843120"/>
+            <a:ext cx="3764160" cy="842760"/>
           </a:xfrm>
           <a:prstGeom prst="rect">
             <a:avLst/>
@@ -8226,7 +8250,7 @@
         <p:spPr>
           <a:xfrm>
             <a:off x="5016600" y="3584880"/>
-            <a:ext cx="3764520" cy="550440"/>
+            <a:ext cx="3764160" cy="550080"/>
           </a:xfrm>
           <a:prstGeom prst="rect">
             <a:avLst/>
@@ -8278,7 +8302,7 @@
         <p:spPr>
           <a:xfrm>
             <a:off x="5016600" y="4117320"/>
-            <a:ext cx="3764520" cy="794520"/>
+            <a:ext cx="3764160" cy="794160"/>
           </a:xfrm>
           <a:prstGeom prst="rect">
             <a:avLst/>
@@ -8340,7 +8364,7 @@
         <p:spPr>
           <a:xfrm>
             <a:off x="384840" y="987840"/>
-            <a:ext cx="3687480" cy="3496680"/>
+            <a:ext cx="3687120" cy="3496320"/>
           </a:xfrm>
           <a:prstGeom prst="roundRect">
             <a:avLst>
@@ -8404,7 +8428,7 @@
         <p:spPr>
           <a:xfrm>
             <a:off x="8519760" y="4831560"/>
-            <a:ext cx="484560" cy="226800"/>
+            <a:ext cx="484200" cy="226800"/>
           </a:xfrm>
           <a:prstGeom prst="rect">
             <a:avLst/>
@@ -8456,7 +8480,7 @@
         <p:spPr>
           <a:xfrm>
             <a:off x="300600" y="228600"/>
-            <a:ext cx="8614440" cy="685440"/>
+            <a:ext cx="8614080" cy="685080"/>
           </a:xfrm>
           <a:prstGeom prst="rect">
             <a:avLst/>
@@ -8485,7 +8509,11 @@
             </a:pPr>
             <a:r>
               <a:rPr b="0" lang="en-US" sz="1800" spc="-1" strike="noStrike">
-                <a:latin typeface="Arial"/>
+                <a:solidFill>
+                  <a:srgbClr val="000000"/>
+                </a:solidFill>
+                <a:latin typeface="Arial"/>
+                <a:ea typeface="DejaVu Sans"/>
               </a:rPr>
               <a:t>TITLE</a:t>
             </a:r>
@@ -8534,7 +8562,7 @@
         <p:spPr>
           <a:xfrm>
             <a:off x="0" y="3075480"/>
-            <a:ext cx="9143280" cy="2494800"/>
+            <a:ext cx="9142920" cy="2494440"/>
           </a:xfrm>
           <a:prstGeom prst="roundRect">
             <a:avLst>
@@ -8598,7 +8626,7 @@
         <p:spPr>
           <a:xfrm>
             <a:off x="474840" y="841680"/>
-            <a:ext cx="2556720" cy="2055240"/>
+            <a:ext cx="2556360" cy="2054880"/>
           </a:xfrm>
           <a:prstGeom prst="roundRect">
             <a:avLst>
@@ -8638,7 +8666,7 @@
         <p:spPr>
           <a:xfrm>
             <a:off x="592920" y="973800"/>
-            <a:ext cx="2289600" cy="729000"/>
+            <a:ext cx="2289240" cy="728640"/>
           </a:xfrm>
           <a:prstGeom prst="rect">
             <a:avLst/>
@@ -8690,7 +8718,7 @@
         <p:spPr>
           <a:xfrm>
             <a:off x="592920" y="1757520"/>
-            <a:ext cx="2289600" cy="1162080"/>
+            <a:ext cx="2289240" cy="1161720"/>
           </a:xfrm>
           <a:prstGeom prst="rect">
             <a:avLst/>
@@ -8752,7 +8780,7 @@
         <p:spPr>
           <a:xfrm>
             <a:off x="3309120" y="841680"/>
-            <a:ext cx="2556720" cy="2055240"/>
+            <a:ext cx="2556360" cy="2054880"/>
           </a:xfrm>
           <a:prstGeom prst="roundRect">
             <a:avLst>
@@ -8792,7 +8820,7 @@
         <p:spPr>
           <a:xfrm>
             <a:off x="3426840" y="973800"/>
-            <a:ext cx="2289600" cy="729000"/>
+            <a:ext cx="2289240" cy="728640"/>
           </a:xfrm>
           <a:prstGeom prst="rect">
             <a:avLst/>
@@ -8844,7 +8872,7 @@
         <p:spPr>
           <a:xfrm>
             <a:off x="3426840" y="1757520"/>
-            <a:ext cx="2289600" cy="1162080"/>
+            <a:ext cx="2289240" cy="1161720"/>
           </a:xfrm>
           <a:prstGeom prst="rect">
             <a:avLst/>
@@ -8896,7 +8924,7 @@
         <p:spPr>
           <a:xfrm>
             <a:off x="6143040" y="841680"/>
-            <a:ext cx="2556720" cy="2055240"/>
+            <a:ext cx="2556360" cy="2054880"/>
           </a:xfrm>
           <a:prstGeom prst="roundRect">
             <a:avLst>
@@ -8936,7 +8964,7 @@
         <p:spPr>
           <a:xfrm>
             <a:off x="6260760" y="973800"/>
-            <a:ext cx="2289600" cy="729000"/>
+            <a:ext cx="2289240" cy="728640"/>
           </a:xfrm>
           <a:prstGeom prst="rect">
             <a:avLst/>
@@ -8988,7 +9016,7 @@
         <p:spPr>
           <a:xfrm>
             <a:off x="6260760" y="1757520"/>
-            <a:ext cx="2289600" cy="1162080"/>
+            <a:ext cx="2289240" cy="1161720"/>
           </a:xfrm>
           <a:prstGeom prst="rect">
             <a:avLst/>
@@ -9040,7 +9068,7 @@
         <p:spPr>
           <a:xfrm>
             <a:off x="8519760" y="4831560"/>
-            <a:ext cx="484560" cy="226800"/>
+            <a:ext cx="484200" cy="226800"/>
           </a:xfrm>
           <a:prstGeom prst="rect">
             <a:avLst/>
@@ -9092,7 +9120,7 @@
         <p:spPr>
           <a:xfrm>
             <a:off x="457200" y="349200"/>
-            <a:ext cx="8457840" cy="1022040"/>
+            <a:ext cx="8457480" cy="1021680"/>
           </a:xfrm>
           <a:prstGeom prst="rect">
             <a:avLst/>
@@ -9121,7 +9149,11 @@
             </a:pPr>
             <a:r>
               <a:rPr b="0" lang="en-US" sz="1800" spc="-1" strike="noStrike">
-                <a:latin typeface="Arial"/>
+                <a:solidFill>
+                  <a:srgbClr val="000000"/>
+                </a:solidFill>
+                <a:latin typeface="Arial"/>
+                <a:ea typeface="DejaVu Sans"/>
               </a:rPr>
               <a:t>TITLE</a:t>
             </a:r>
@@ -9177,7 +9209,7 @@
         <p:spPr>
           <a:xfrm>
             <a:off x="5014080" y="250200"/>
-            <a:ext cx="3820320" cy="4624920"/>
+            <a:ext cx="3819960" cy="4624560"/>
           </a:xfrm>
           <a:prstGeom prst="roundRect">
             <a:avLst>
@@ -9243,7 +9275,7 @@
         <p:spPr>
           <a:xfrm>
             <a:off x="329400" y="250200"/>
-            <a:ext cx="4424760" cy="4624920"/>
+            <a:ext cx="4424400" cy="4624560"/>
           </a:xfrm>
           <a:prstGeom prst="roundRect">
             <a:avLst>
@@ -9281,7 +9313,7 @@
         <p:spPr>
           <a:xfrm>
             <a:off x="581760" y="828720"/>
-            <a:ext cx="3901680" cy="550440"/>
+            <a:ext cx="3901320" cy="550080"/>
           </a:xfrm>
           <a:prstGeom prst="rect">
             <a:avLst/>
@@ -9343,7 +9375,7 @@
         <p:spPr>
           <a:xfrm>
             <a:off x="581760" y="1364400"/>
-            <a:ext cx="3901680" cy="789480"/>
+            <a:ext cx="3901320" cy="789120"/>
           </a:xfrm>
           <a:prstGeom prst="rect">
             <a:avLst/>
@@ -9405,7 +9437,7 @@
         <p:spPr>
           <a:xfrm>
             <a:off x="578160" y="2154600"/>
-            <a:ext cx="3901680" cy="550440"/>
+            <a:ext cx="3901320" cy="550080"/>
           </a:xfrm>
           <a:prstGeom prst="rect">
             <a:avLst/>
@@ -9457,7 +9489,7 @@
         <p:spPr>
           <a:xfrm>
             <a:off x="578160" y="2687040"/>
-            <a:ext cx="3901680" cy="843120"/>
+            <a:ext cx="3901320" cy="842760"/>
           </a:xfrm>
           <a:prstGeom prst="rect">
             <a:avLst/>
@@ -9519,7 +9551,7 @@
         <p:spPr>
           <a:xfrm>
             <a:off x="578160" y="3482280"/>
-            <a:ext cx="3901680" cy="550440"/>
+            <a:ext cx="3901320" cy="550080"/>
           </a:xfrm>
           <a:prstGeom prst="rect">
             <a:avLst/>
@@ -9571,7 +9603,7 @@
         <p:spPr>
           <a:xfrm>
             <a:off x="578160" y="4015080"/>
-            <a:ext cx="3901680" cy="794520"/>
+            <a:ext cx="3901320" cy="794160"/>
           </a:xfrm>
           <a:prstGeom prst="rect">
             <a:avLst/>
@@ -9633,7 +9665,7 @@
         <p:spPr>
           <a:xfrm>
             <a:off x="8519760" y="4831560"/>
-            <a:ext cx="484560" cy="226800"/>
+            <a:ext cx="484200" cy="226800"/>
           </a:xfrm>
           <a:prstGeom prst="rect">
             <a:avLst/>
@@ -9685,7 +9717,7 @@
         <p:spPr>
           <a:xfrm>
             <a:off x="493200" y="300600"/>
-            <a:ext cx="4078440" cy="842040"/>
+            <a:ext cx="4078080" cy="841680"/>
           </a:xfrm>
           <a:prstGeom prst="rect">
             <a:avLst/>
@@ -9714,7 +9746,11 @@
             </a:pPr>
             <a:r>
               <a:rPr b="0" lang="en-US" sz="1800" spc="-1" strike="noStrike">
-                <a:latin typeface="Arial"/>
+                <a:solidFill>
+                  <a:srgbClr val="000000"/>
+                </a:solidFill>
+                <a:latin typeface="Arial"/>
+                <a:ea typeface="DejaVu Sans"/>
               </a:rPr>
               <a:t>TITLE</a:t>
             </a:r>
@@ -9763,7 +9799,7 @@
         <p:spPr>
           <a:xfrm>
             <a:off x="479160" y="2886480"/>
-            <a:ext cx="365040" cy="359640"/>
+            <a:ext cx="364680" cy="359280"/>
           </a:xfrm>
           <a:prstGeom prst="roundRect">
             <a:avLst>
@@ -9793,7 +9829,7 @@
         <p:spPr>
           <a:xfrm>
             <a:off x="3440880" y="2886480"/>
-            <a:ext cx="365040" cy="359640"/>
+            <a:ext cx="364680" cy="359280"/>
           </a:xfrm>
           <a:prstGeom prst="roundRect">
             <a:avLst>
@@ -9823,7 +9859,7 @@
         <p:spPr>
           <a:xfrm>
             <a:off x="6402960" y="2886480"/>
-            <a:ext cx="365040" cy="359640"/>
+            <a:ext cx="364680" cy="359280"/>
           </a:xfrm>
           <a:prstGeom prst="roundRect">
             <a:avLst>
@@ -9853,7 +9889,7 @@
         <p:spPr>
           <a:xfrm>
             <a:off x="479160" y="2883600"/>
-            <a:ext cx="365040" cy="363960"/>
+            <a:ext cx="364680" cy="363960"/>
           </a:xfrm>
           <a:prstGeom prst="rect">
             <a:avLst/>
@@ -9905,7 +9941,7 @@
         <p:spPr>
           <a:xfrm>
             <a:off x="3440880" y="2883600"/>
-            <a:ext cx="365040" cy="363960"/>
+            <a:ext cx="364680" cy="363960"/>
           </a:xfrm>
           <a:prstGeom prst="rect">
             <a:avLst/>
@@ -9957,7 +9993,7 @@
         <p:spPr>
           <a:xfrm>
             <a:off x="6402960" y="2883600"/>
-            <a:ext cx="365040" cy="363960"/>
+            <a:ext cx="364680" cy="363960"/>
           </a:xfrm>
           <a:prstGeom prst="rect">
             <a:avLst/>
@@ -10009,7 +10045,7 @@
         <p:spPr>
           <a:xfrm>
             <a:off x="858960" y="2571840"/>
-            <a:ext cx="2354760" cy="713520"/>
+            <a:ext cx="2354400" cy="713160"/>
           </a:xfrm>
           <a:prstGeom prst="rect">
             <a:avLst/>
@@ -10071,7 +10107,7 @@
         <p:spPr>
           <a:xfrm>
             <a:off x="858960" y="3356280"/>
-            <a:ext cx="2354760" cy="1564920"/>
+            <a:ext cx="2354400" cy="1564560"/>
           </a:xfrm>
           <a:prstGeom prst="rect">
             <a:avLst/>
@@ -10133,7 +10169,7 @@
         <p:spPr>
           <a:xfrm>
             <a:off x="3821040" y="2571840"/>
-            <a:ext cx="2354760" cy="713520"/>
+            <a:ext cx="2354400" cy="713160"/>
           </a:xfrm>
           <a:prstGeom prst="rect">
             <a:avLst/>
@@ -10195,7 +10231,7 @@
         <p:spPr>
           <a:xfrm>
             <a:off x="3821040" y="3356280"/>
-            <a:ext cx="2354760" cy="1564920"/>
+            <a:ext cx="2354400" cy="1564560"/>
           </a:xfrm>
           <a:prstGeom prst="rect">
             <a:avLst/>
@@ -10257,7 +10293,7 @@
         <p:spPr>
           <a:xfrm>
             <a:off x="6782760" y="2571840"/>
-            <a:ext cx="2293920" cy="713520"/>
+            <a:ext cx="2293560" cy="713160"/>
           </a:xfrm>
           <a:prstGeom prst="rect">
             <a:avLst/>
@@ -10319,7 +10355,7 @@
         <p:spPr>
           <a:xfrm>
             <a:off x="6782760" y="3356280"/>
-            <a:ext cx="2293920" cy="1564920"/>
+            <a:ext cx="2293560" cy="1564560"/>
           </a:xfrm>
           <a:prstGeom prst="rect">
             <a:avLst/>
@@ -10381,7 +10417,7 @@
         <p:spPr>
           <a:xfrm>
             <a:off x="0" y="-478800"/>
-            <a:ext cx="9143280" cy="2327760"/>
+            <a:ext cx="9142920" cy="2327400"/>
           </a:xfrm>
           <a:prstGeom prst="roundRect">
             <a:avLst>
@@ -10445,7 +10481,7 @@
         <p:spPr>
           <a:xfrm>
             <a:off x="8519760" y="4831560"/>
-            <a:ext cx="484560" cy="226800"/>
+            <a:ext cx="484200" cy="226800"/>
           </a:xfrm>
           <a:prstGeom prst="rect">
             <a:avLst/>
@@ -10497,7 +10533,7 @@
         <p:spPr>
           <a:xfrm>
             <a:off x="228600" y="2057400"/>
-            <a:ext cx="8686440" cy="685440"/>
+            <a:ext cx="8686080" cy="685080"/>
           </a:xfrm>
           <a:prstGeom prst="rect">
             <a:avLst/>
@@ -10526,7 +10562,11 @@
             </a:pPr>
             <a:r>
               <a:rPr b="0" lang="en-US" sz="1800" spc="-1" strike="noStrike">
-                <a:latin typeface="Arial"/>
+                <a:solidFill>
+                  <a:srgbClr val="000000"/>
+                </a:solidFill>
+                <a:latin typeface="Arial"/>
+                <a:ea typeface="DejaVu Sans"/>
               </a:rPr>
               <a:t>TITLE</a:t>
             </a:r>
